--- a/temp_Proposal/outputs/ICEBREAKER_기획서_6단계_전체스토리라인_수정본.pptx
+++ b/temp_Proposal/outputs/ICEBREAKER_기획서_6단계_전체스토리라인_수정본.pptx
@@ -2,30 +2,30 @@
 <file path=ppt/presentation.xml><?xml version="1.0" encoding="utf-8"?>
 <p:presentation xmlns:p="http://schemas.openxmlformats.org/presentationml/2006/main">
   <p:sldMasterIdLst>
-    <p:sldMasterId xmlns:r="http://schemas.openxmlformats.org/officeDocument/2006/relationships" id="2147483648" r:id="Ra7ae25c0013e48ee"/>
+    <p:sldMasterId xmlns:r="http://schemas.openxmlformats.org/officeDocument/2006/relationships" id="2147483648" r:id="Re0264709bebf42c3"/>
   </p:sldMasterIdLst>
   <p:notesMasterIdLst>
-    <p:notesMasterId xmlns:r="http://schemas.openxmlformats.org/officeDocument/2006/relationships" r:id="R5c54f8c587c646e3"/>
+    <p:notesMasterId xmlns:r="http://schemas.openxmlformats.org/officeDocument/2006/relationships" r:id="R82abeaee67934dec"/>
   </p:notesMasterIdLst>
   <p:sldIdLst>
-    <p:sldId xmlns:r="http://schemas.openxmlformats.org/officeDocument/2006/relationships" id="256" r:id="R7b010329119e42b6"/>
-    <p:sldId xmlns:r="http://schemas.openxmlformats.org/officeDocument/2006/relationships" id="257" r:id="Rfab29475b8fe4b1f"/>
-    <p:sldId xmlns:r="http://schemas.openxmlformats.org/officeDocument/2006/relationships" id="258" r:id="R3496703e425d47b2"/>
-    <p:sldId xmlns:r="http://schemas.openxmlformats.org/officeDocument/2006/relationships" id="259" r:id="R88670a17b23240ae"/>
-    <p:sldId xmlns:r="http://schemas.openxmlformats.org/officeDocument/2006/relationships" id="260" r:id="R3b60b7cec2eb41b7"/>
-    <p:sldId xmlns:r="http://schemas.openxmlformats.org/officeDocument/2006/relationships" id="261" r:id="Rfca9d99b89e8470e"/>
-    <p:sldId xmlns:r="http://schemas.openxmlformats.org/officeDocument/2006/relationships" id="262" r:id="Rb202492ea7ed4c93"/>
-    <p:sldId xmlns:r="http://schemas.openxmlformats.org/officeDocument/2006/relationships" id="263" r:id="R29b48d8808fd4f06"/>
-    <p:sldId xmlns:r="http://schemas.openxmlformats.org/officeDocument/2006/relationships" id="264" r:id="R32928ce0800a4288"/>
-    <p:sldId xmlns:r="http://schemas.openxmlformats.org/officeDocument/2006/relationships" id="265" r:id="R4e5e9a21c8d44617"/>
-    <p:sldId xmlns:r="http://schemas.openxmlformats.org/officeDocument/2006/relationships" id="266" r:id="Rc6a877ccbfed41d8"/>
-    <p:sldId xmlns:r="http://schemas.openxmlformats.org/officeDocument/2006/relationships" id="267" r:id="R633470f5a1ad462f"/>
-    <p:sldId xmlns:r="http://schemas.openxmlformats.org/officeDocument/2006/relationships" id="268" r:id="Rd91c10ac05fc4f20"/>
-    <p:sldId xmlns:r="http://schemas.openxmlformats.org/officeDocument/2006/relationships" id="269" r:id="R1d062a07abaa4f7d"/>
-    <p:sldId xmlns:r="http://schemas.openxmlformats.org/officeDocument/2006/relationships" id="270" r:id="R54e7cea09e4e430d"/>
-    <p:sldId xmlns:r="http://schemas.openxmlformats.org/officeDocument/2006/relationships" id="271" r:id="Rd2165b60db754af2"/>
-    <p:sldId xmlns:r="http://schemas.openxmlformats.org/officeDocument/2006/relationships" id="272" r:id="Rad9478158c084f87"/>
-    <p:sldId xmlns:r="http://schemas.openxmlformats.org/officeDocument/2006/relationships" id="273" r:id="R8022b43261694864"/>
+    <p:sldId xmlns:r="http://schemas.openxmlformats.org/officeDocument/2006/relationships" id="256" r:id="R7f6413f6077d4313"/>
+    <p:sldId xmlns:r="http://schemas.openxmlformats.org/officeDocument/2006/relationships" id="257" r:id="R84bdbb4d16f54b1a"/>
+    <p:sldId xmlns:r="http://schemas.openxmlformats.org/officeDocument/2006/relationships" id="258" r:id="Rd79b3574d0ec4a5b"/>
+    <p:sldId xmlns:r="http://schemas.openxmlformats.org/officeDocument/2006/relationships" id="259" r:id="Ra739905065bf4cb4"/>
+    <p:sldId xmlns:r="http://schemas.openxmlformats.org/officeDocument/2006/relationships" id="260" r:id="R4b271fd5095f4833"/>
+    <p:sldId xmlns:r="http://schemas.openxmlformats.org/officeDocument/2006/relationships" id="261" r:id="R4767e7366bda4f13"/>
+    <p:sldId xmlns:r="http://schemas.openxmlformats.org/officeDocument/2006/relationships" id="262" r:id="R4decd8877b354d75"/>
+    <p:sldId xmlns:r="http://schemas.openxmlformats.org/officeDocument/2006/relationships" id="263" r:id="Rd19d779de57b44af"/>
+    <p:sldId xmlns:r="http://schemas.openxmlformats.org/officeDocument/2006/relationships" id="264" r:id="R76c90661d3ec4d0a"/>
+    <p:sldId xmlns:r="http://schemas.openxmlformats.org/officeDocument/2006/relationships" id="265" r:id="R001f2f60aa8c4d4a"/>
+    <p:sldId xmlns:r="http://schemas.openxmlformats.org/officeDocument/2006/relationships" id="266" r:id="R7e6e08d67a4442cf"/>
+    <p:sldId xmlns:r="http://schemas.openxmlformats.org/officeDocument/2006/relationships" id="267" r:id="R53f166c8ad2546db"/>
+    <p:sldId xmlns:r="http://schemas.openxmlformats.org/officeDocument/2006/relationships" id="268" r:id="Re6f647426efb466e"/>
+    <p:sldId xmlns:r="http://schemas.openxmlformats.org/officeDocument/2006/relationships" id="269" r:id="R5302aec9a4a34fff"/>
+    <p:sldId xmlns:r="http://schemas.openxmlformats.org/officeDocument/2006/relationships" id="270" r:id="R7af695d80a7e4aac"/>
+    <p:sldId xmlns:r="http://schemas.openxmlformats.org/officeDocument/2006/relationships" id="271" r:id="R188a79a1e0994092"/>
+    <p:sldId xmlns:r="http://schemas.openxmlformats.org/officeDocument/2006/relationships" id="272" r:id="R20f1b63b798544dd"/>
+    <p:sldId xmlns:r="http://schemas.openxmlformats.org/officeDocument/2006/relationships" id="273" r:id="R9bece59b7cb84e90"/>
   </p:sldIdLst>
   <p:sldSz cx="12192000" cy="6858000"/>
   <p:notesSz cx="6858000" cy="9144000"/>
@@ -2194,7 +2194,7 @@
   </p:cSld>
   <p:clrMap bg1="lt1" tx1="dk1" bg2="lt2" tx2="dk2" accent1="accent1" accent2="accent2" accent3="accent3" accent4="accent4" accent5="accent5" accent6="accent6" hlink="hlink" folHlink="folHlink"/>
   <p:sldLayoutIdLst>
-    <p:sldLayoutId xmlns:r="http://schemas.openxmlformats.org/officeDocument/2006/relationships" id="2147483649" r:id="Ra81399bf10ce4fa4"/>
+    <p:sldLayoutId xmlns:r="http://schemas.openxmlformats.org/officeDocument/2006/relationships" id="2147483649" r:id="R71b6cfe0a5e24313"/>
   </p:sldLayoutIdLst>
 </p:sldMaster>
 </file>
@@ -2680,7 +2680,7 @@
           <p:nvPr/>
         </p:nvPicPr>
         <p:blipFill>
-          <a:blip xmlns:r="http://schemas.openxmlformats.org/officeDocument/2006/relationships" xmlns:a="http://schemas.openxmlformats.org/drawingml/2006/main" r:embed="R212f921615134b04">
+          <a:blip xmlns:r="http://schemas.openxmlformats.org/officeDocument/2006/relationships" xmlns:a="http://schemas.openxmlformats.org/drawingml/2006/main" r:embed="R1e13163f6cf1462a">
             <a:alphaModFix amt="65000"/>
           </a:blip>
           <a:stretch xmlns:a="http://schemas.openxmlformats.org/drawingml/2006/main"/>
@@ -6760,7 +6760,29 @@
                 <a:ea typeface="Malgun Gothic"/>
                 <a:cs typeface="Malgun Gothic"/>
               </a:rPr>
-              <a:t>도킹 — 480×56px (taskbar 바로 위)</a:t>
+              <a:t>도킹 — </a:t>
+            </a:r>
+            <a:r>
+              <a:rPr sz="1300" b="1" u="none">
+                <a:solidFill>
+                  <a:srgbClr val="16283B"/>
+                </a:solidFill>
+                <a:latin typeface="Malgun Gothic"/>
+                <a:ea typeface="Malgun Gothic"/>
+                <a:cs typeface="Malgun Gothic"/>
+              </a:rPr>
+              <a:t>800×72</a:t>
+            </a:r>
+            <a:r>
+              <a:rPr sz="1300" b="1" u="none">
+                <a:solidFill>
+                  <a:srgbClr val="16283B"/>
+                </a:solidFill>
+                <a:latin typeface="Malgun Gothic"/>
+                <a:ea typeface="Malgun Gothic"/>
+                <a:cs typeface="Malgun Gothic"/>
+              </a:rPr>
+              <a:t>px (taskbar 바로 위)</a:t>
             </a:r>
           </a:p>
         </p:txBody>
@@ -7140,7 +7162,29 @@
                 <a:ea typeface="Malgun Gothic"/>
                 <a:cs typeface="Malgun Gothic"/>
               </a:rPr>
-              <a:t>확장 — 720×480px (준비·플레이·정산 공통 장면)</a:t>
+              <a:t>확장 — </a:t>
+            </a:r>
+            <a:r>
+              <a:rPr sz="1300" b="1" u="none">
+                <a:solidFill>
+                  <a:srgbClr val="16283B"/>
+                </a:solidFill>
+                <a:latin typeface="Malgun Gothic"/>
+                <a:ea typeface="Malgun Gothic"/>
+                <a:cs typeface="Malgun Gothic"/>
+              </a:rPr>
+              <a:t>960×540</a:t>
+            </a:r>
+            <a:r>
+              <a:rPr sz="1300" b="1" u="none">
+                <a:solidFill>
+                  <a:srgbClr val="16283B"/>
+                </a:solidFill>
+                <a:latin typeface="Malgun Gothic"/>
+                <a:ea typeface="Malgun Gothic"/>
+                <a:cs typeface="Malgun Gothic"/>
+              </a:rPr>
+              <a:t>px (준비·플레이·정산 공통 장면)</a:t>
             </a:r>
           </a:p>
         </p:txBody>
@@ -14245,7 +14289,29 @@
                 <a:ea typeface="Malgun Gothic"/>
                 <a:cs typeface="Malgun Gothic"/>
               </a:rPr>
-              <a:t>480×56 ↔ 720×480</a:t>
+              <a:t>800×72</a:t>
+            </a:r>
+            <a:r>
+              <a:rPr sz="930" b="0" u="none">
+                <a:solidFill>
+                  <a:srgbClr val="5A7184"/>
+                </a:solidFill>
+                <a:latin typeface="Malgun Gothic"/>
+                <a:ea typeface="Malgun Gothic"/>
+                <a:cs typeface="Malgun Gothic"/>
+              </a:rPr>
+              <a:t> ↔ </a:t>
+            </a:r>
+            <a:r>
+              <a:rPr sz="930" b="0" u="none">
+                <a:solidFill>
+                  <a:srgbClr val="5A7184"/>
+                </a:solidFill>
+                <a:latin typeface="Malgun Gothic"/>
+                <a:ea typeface="Malgun Gothic"/>
+                <a:cs typeface="Malgun Gothic"/>
+              </a:rPr>
+              <a:t>960×540</a:t>
             </a:r>
           </a:p>
           <a:p xmlns:a="http://schemas.openxmlformats.org/drawingml/2006/main">
@@ -18359,7 +18425,7 @@
           <p:nvPr/>
         </p:nvPicPr>
         <p:blipFill>
-          <a:blip xmlns:r="http://schemas.openxmlformats.org/officeDocument/2006/relationships" xmlns:a="http://schemas.openxmlformats.org/drawingml/2006/main" r:embed="Rf16af6e77ac54616"/>
+          <a:blip xmlns:r="http://schemas.openxmlformats.org/officeDocument/2006/relationships" xmlns:a="http://schemas.openxmlformats.org/drawingml/2006/main" r:embed="R1bef0e90f0dc4973"/>
           <a:stretch xmlns:a="http://schemas.openxmlformats.org/drawingml/2006/main"/>
         </p:blipFill>
         <p:spPr>
@@ -18604,7 +18670,7 @@
           <p:nvPr/>
         </p:nvPicPr>
         <p:blipFill>
-          <a:blip xmlns:r="http://schemas.openxmlformats.org/officeDocument/2006/relationships" xmlns:a="http://schemas.openxmlformats.org/drawingml/2006/main" r:embed="Rcac0aa7a3cb14331"/>
+          <a:blip xmlns:r="http://schemas.openxmlformats.org/officeDocument/2006/relationships" xmlns:a="http://schemas.openxmlformats.org/drawingml/2006/main" r:embed="R9ef883d623d04ebc"/>
           <a:stretch xmlns:a="http://schemas.openxmlformats.org/drawingml/2006/main"/>
         </p:blipFill>
         <p:spPr>
@@ -18849,7 +18915,7 @@
           <p:nvPr/>
         </p:nvPicPr>
         <p:blipFill>
-          <a:blip xmlns:r="http://schemas.openxmlformats.org/officeDocument/2006/relationships" xmlns:a="http://schemas.openxmlformats.org/drawingml/2006/main" r:embed="R30a934b1de494eb3"/>
+          <a:blip xmlns:r="http://schemas.openxmlformats.org/officeDocument/2006/relationships" xmlns:a="http://schemas.openxmlformats.org/drawingml/2006/main" r:embed="Radc251883a234d19"/>
           <a:stretch xmlns:a="http://schemas.openxmlformats.org/drawingml/2006/main"/>
         </p:blipFill>
         <p:spPr>
@@ -19094,7 +19160,7 @@
           <p:nvPr/>
         </p:nvPicPr>
         <p:blipFill>
-          <a:blip xmlns:r="http://schemas.openxmlformats.org/officeDocument/2006/relationships" xmlns:a="http://schemas.openxmlformats.org/drawingml/2006/main" r:embed="R26e2d57dbbbb4bdb"/>
+          <a:blip xmlns:r="http://schemas.openxmlformats.org/officeDocument/2006/relationships" xmlns:a="http://schemas.openxmlformats.org/drawingml/2006/main" r:embed="Rb20dfa3ac7304eae"/>
           <a:stretch xmlns:a="http://schemas.openxmlformats.org/drawingml/2006/main"/>
         </p:blipFill>
         <p:spPr>
@@ -19403,7 +19469,7 @@
           <p:nvPr/>
         </p:nvPicPr>
         <p:blipFill>
-          <a:blip xmlns:r="http://schemas.openxmlformats.org/officeDocument/2006/relationships" xmlns:a="http://schemas.openxmlformats.org/drawingml/2006/main" r:embed="Rfa8fb123afcd4596"/>
+          <a:blip xmlns:r="http://schemas.openxmlformats.org/officeDocument/2006/relationships" xmlns:a="http://schemas.openxmlformats.org/drawingml/2006/main" r:embed="Rb689e9e649304b84"/>
           <a:stretch xmlns:a="http://schemas.openxmlformats.org/drawingml/2006/main"/>
         </p:blipFill>
         <p:spPr>
@@ -19559,7 +19625,7 @@
           <p:nvPr/>
         </p:nvPicPr>
         <p:blipFill>
-          <a:blip xmlns:r="http://schemas.openxmlformats.org/officeDocument/2006/relationships" xmlns:a="http://schemas.openxmlformats.org/drawingml/2006/main" r:embed="Re44c4a7130cc4c69"/>
+          <a:blip xmlns:r="http://schemas.openxmlformats.org/officeDocument/2006/relationships" xmlns:a="http://schemas.openxmlformats.org/drawingml/2006/main" r:embed="R8e03507603594cfe"/>
           <a:stretch xmlns:a="http://schemas.openxmlformats.org/drawingml/2006/main"/>
         </p:blipFill>
         <p:spPr>
@@ -19715,7 +19781,7 @@
           <p:nvPr/>
         </p:nvPicPr>
         <p:blipFill>
-          <a:blip xmlns:r="http://schemas.openxmlformats.org/officeDocument/2006/relationships" xmlns:a="http://schemas.openxmlformats.org/drawingml/2006/main" r:embed="R35900be7a0454fc6"/>
+          <a:blip xmlns:r="http://schemas.openxmlformats.org/officeDocument/2006/relationships" xmlns:a="http://schemas.openxmlformats.org/drawingml/2006/main" r:embed="Rb159b8e2c2ad4d36"/>
           <a:stretch xmlns:a="http://schemas.openxmlformats.org/drawingml/2006/main"/>
         </p:blipFill>
         <p:spPr>
@@ -19871,7 +19937,7 @@
           <p:nvPr/>
         </p:nvPicPr>
         <p:blipFill>
-          <a:blip xmlns:r="http://schemas.openxmlformats.org/officeDocument/2006/relationships" xmlns:a="http://schemas.openxmlformats.org/drawingml/2006/main" r:embed="Rb3934b6211ac4fb1"/>
+          <a:blip xmlns:r="http://schemas.openxmlformats.org/officeDocument/2006/relationships" xmlns:a="http://schemas.openxmlformats.org/drawingml/2006/main" r:embed="R11efa3de7ae54f49"/>
           <a:stretch xmlns:a="http://schemas.openxmlformats.org/drawingml/2006/main"/>
         </p:blipFill>
         <p:spPr>
@@ -19944,7 +20010,62 @@
                 <a:ea typeface="Malgun Gothic"/>
                 <a:cs typeface="Malgun Gothic"/>
               </a:rPr>
-              <a:t>아티스트 — PSD/KRA 원본 + 투명 PNG + 720×480 합성</a:t>
+              <a:t>아티스트 — </a:t>
+            </a:r>
+            <a:r>
+              <a:rPr sz="1050" b="0" u="none">
+                <a:solidFill>
+                  <a:srgbClr val="16283B"/>
+                </a:solidFill>
+                <a:latin typeface="Malgun Gothic"/>
+                <a:ea typeface="Malgun Gothic"/>
+                <a:cs typeface="Malgun Gothic"/>
+              </a:rPr>
+              <a:t>.clip</a:t>
+            </a:r>
+            <a:r>
+              <a:rPr sz="1050" b="0" u="none">
+                <a:solidFill>
+                  <a:srgbClr val="16283B"/>
+                </a:solidFill>
+                <a:latin typeface="Malgun Gothic"/>
+                <a:ea typeface="Malgun Gothic"/>
+                <a:cs typeface="Malgun Gothic"/>
+              </a:rPr>
+              <a:t> 원본 + </a:t>
+            </a:r>
+            <a:r>
+              <a:rPr sz="1050" b="0" u="none">
+                <a:solidFill>
+                  <a:srgbClr val="16283B"/>
+                </a:solidFill>
+                <a:latin typeface="Malgun Gothic"/>
+                <a:ea typeface="Malgun Gothic"/>
+                <a:cs typeface="Malgun Gothic"/>
+              </a:rPr>
+              <a:t>2× 투명 PNG</a:t>
+            </a:r>
+            <a:r>
+              <a:rPr sz="1050" b="0" u="none">
+                <a:solidFill>
+                  <a:srgbClr val="16283B"/>
+                </a:solidFill>
+                <a:latin typeface="Malgun Gothic"/>
+                <a:ea typeface="Malgun Gothic"/>
+                <a:cs typeface="Malgun Gothic"/>
+              </a:rPr>
+              <a:t> + </a:t>
+            </a:r>
+            <a:r>
+              <a:rPr sz="1050" b="0" u="none">
+                <a:solidFill>
+                  <a:srgbClr val="16283B"/>
+                </a:solidFill>
+                <a:latin typeface="Malgun Gothic"/>
+                <a:ea typeface="Malgun Gothic"/>
+                <a:cs typeface="Malgun Gothic"/>
+              </a:rPr>
+              <a:t>1920×1080 합성</a:t>
             </a:r>
           </a:p>
           <a:p xmlns:a="http://schemas.openxmlformats.org/drawingml/2006/main">
@@ -22302,7 +22423,7 @@
           <p:nvPr/>
         </p:nvPicPr>
         <p:blipFill>
-          <a:blip xmlns:r="http://schemas.openxmlformats.org/officeDocument/2006/relationships" xmlns:a="http://schemas.openxmlformats.org/drawingml/2006/main" r:embed="R6fa4632f65b246f2">
+          <a:blip xmlns:r="http://schemas.openxmlformats.org/officeDocument/2006/relationships" xmlns:a="http://schemas.openxmlformats.org/drawingml/2006/main" r:embed="R7b98a4610f554352">
             <a:alphaModFix amt="65000"/>
           </a:blip>
           <a:stretch xmlns:a="http://schemas.openxmlformats.org/drawingml/2006/main"/>
@@ -22611,7 +22732,7 @@
           <p:nvPr/>
         </p:nvPicPr>
         <p:blipFill>
-          <a:blip xmlns:r="http://schemas.openxmlformats.org/officeDocument/2006/relationships" xmlns:a="http://schemas.openxmlformats.org/drawingml/2006/main" r:embed="Rbe28a48b65444fc6"/>
+          <a:blip xmlns:r="http://schemas.openxmlformats.org/officeDocument/2006/relationships" xmlns:a="http://schemas.openxmlformats.org/drawingml/2006/main" r:embed="R7fa18500737d49d5"/>
           <a:stretch xmlns:a="http://schemas.openxmlformats.org/drawingml/2006/main"/>
         </p:blipFill>
         <p:spPr>
@@ -29412,7 +29533,7 @@
           <p:nvPr/>
         </p:nvPicPr>
         <p:blipFill>
-          <a:blip xmlns:r="http://schemas.openxmlformats.org/officeDocument/2006/relationships" xmlns:a="http://schemas.openxmlformats.org/drawingml/2006/main" r:embed="R292ac50e1a6147d9"/>
+          <a:blip xmlns:r="http://schemas.openxmlformats.org/officeDocument/2006/relationships" xmlns:a="http://schemas.openxmlformats.org/drawingml/2006/main" r:embed="R626f39ea39164c33"/>
           <a:stretch xmlns:a="http://schemas.openxmlformats.org/drawingml/2006/main"/>
         </p:blipFill>
         <p:spPr>
@@ -29672,7 +29793,7 @@
           <p:nvPr/>
         </p:nvPicPr>
         <p:blipFill>
-          <a:blip xmlns:r="http://schemas.openxmlformats.org/officeDocument/2006/relationships" xmlns:a="http://schemas.openxmlformats.org/drawingml/2006/main" r:embed="R2481b1cd9d964593"/>
+          <a:blip xmlns:r="http://schemas.openxmlformats.org/officeDocument/2006/relationships" xmlns:a="http://schemas.openxmlformats.org/drawingml/2006/main" r:embed="R5575e8cb620d430f"/>
           <a:stretch xmlns:a="http://schemas.openxmlformats.org/drawingml/2006/main"/>
         </p:blipFill>
         <p:spPr>
@@ -29932,7 +30053,7 @@
           <p:nvPr/>
         </p:nvPicPr>
         <p:blipFill>
-          <a:blip xmlns:r="http://schemas.openxmlformats.org/officeDocument/2006/relationships" xmlns:a="http://schemas.openxmlformats.org/drawingml/2006/main" r:embed="R24b7ab2b44794437"/>
+          <a:blip xmlns:r="http://schemas.openxmlformats.org/officeDocument/2006/relationships" xmlns:a="http://schemas.openxmlformats.org/drawingml/2006/main" r:embed="R05a8640e97074948"/>
           <a:stretch xmlns:a="http://schemas.openxmlformats.org/drawingml/2006/main"/>
         </p:blipFill>
         <p:spPr>
@@ -30192,7 +30313,7 @@
           <p:nvPr/>
         </p:nvPicPr>
         <p:blipFill>
-          <a:blip xmlns:r="http://schemas.openxmlformats.org/officeDocument/2006/relationships" xmlns:a="http://schemas.openxmlformats.org/drawingml/2006/main" r:embed="R835a0c07fda7474c"/>
+          <a:blip xmlns:r="http://schemas.openxmlformats.org/officeDocument/2006/relationships" xmlns:a="http://schemas.openxmlformats.org/drawingml/2006/main" r:embed="R40258ea875e547cc"/>
           <a:stretch xmlns:a="http://schemas.openxmlformats.org/drawingml/2006/main"/>
         </p:blipFill>
         <p:spPr>
@@ -38099,7 +38220,7 @@
           <p:nvPr/>
         </p:nvPicPr>
         <p:blipFill>
-          <a:blip xmlns:r="http://schemas.openxmlformats.org/officeDocument/2006/relationships" xmlns:a="http://schemas.openxmlformats.org/drawingml/2006/main" r:embed="Rac352c6ab73a4898"/>
+          <a:blip xmlns:r="http://schemas.openxmlformats.org/officeDocument/2006/relationships" xmlns:a="http://schemas.openxmlformats.org/drawingml/2006/main" r:embed="R3aeb7358578846f0"/>
           <a:stretch xmlns:a="http://schemas.openxmlformats.org/drawingml/2006/main"/>
         </p:blipFill>
         <p:spPr>
@@ -40078,7 +40199,7 @@
           <p:nvPr/>
         </p:nvPicPr>
         <p:blipFill>
-          <a:blip xmlns:r="http://schemas.openxmlformats.org/officeDocument/2006/relationships" xmlns:a="http://schemas.openxmlformats.org/drawingml/2006/main" r:embed="Rcb969f9c285247ea">
+          <a:blip xmlns:r="http://schemas.openxmlformats.org/officeDocument/2006/relationships" xmlns:a="http://schemas.openxmlformats.org/drawingml/2006/main" r:embed="Raf28157326fc46f3">
             <a:alphaModFix amt="65000"/>
           </a:blip>
           <a:stretch xmlns:a="http://schemas.openxmlformats.org/drawingml/2006/main"/>
@@ -40342,7 +40463,7 @@
           <p:nvPr/>
         </p:nvPicPr>
         <p:blipFill>
-          <a:blip xmlns:r="http://schemas.openxmlformats.org/officeDocument/2006/relationships" xmlns:a="http://schemas.openxmlformats.org/drawingml/2006/main" r:embed="Rcb969f9c285247ea">
+          <a:blip xmlns:r="http://schemas.openxmlformats.org/officeDocument/2006/relationships" xmlns:a="http://schemas.openxmlformats.org/drawingml/2006/main" r:embed="Raf28157326fc46f3">
             <a:alphaModFix amt="65000"/>
           </a:blip>
           <a:stretch xmlns:a="http://schemas.openxmlformats.org/drawingml/2006/main"/>
@@ -40606,7 +40727,7 @@
           <p:nvPr/>
         </p:nvPicPr>
         <p:blipFill>
-          <a:blip xmlns:r="http://schemas.openxmlformats.org/officeDocument/2006/relationships" xmlns:a="http://schemas.openxmlformats.org/drawingml/2006/main" r:embed="Rcb969f9c285247ea">
+          <a:blip xmlns:r="http://schemas.openxmlformats.org/officeDocument/2006/relationships" xmlns:a="http://schemas.openxmlformats.org/drawingml/2006/main" r:embed="Raf28157326fc46f3">
             <a:alphaModFix amt="65000"/>
           </a:blip>
           <a:stretch xmlns:a="http://schemas.openxmlformats.org/drawingml/2006/main"/>
@@ -41191,7 +41312,7 @@
           <p:nvPr/>
         </p:nvPicPr>
         <p:blipFill>
-          <a:blip xmlns:r="http://schemas.openxmlformats.org/officeDocument/2006/relationships" xmlns:a="http://schemas.openxmlformats.org/drawingml/2006/main" r:embed="R4c3617a65fa846f5"/>
+          <a:blip xmlns:r="http://schemas.openxmlformats.org/officeDocument/2006/relationships" xmlns:a="http://schemas.openxmlformats.org/drawingml/2006/main" r:embed="R56dce58e79664e59"/>
           <a:stretch xmlns:a="http://schemas.openxmlformats.org/drawingml/2006/main"/>
         </p:blipFill>
         <p:spPr>
@@ -41398,7 +41519,7 @@
           <p:nvPr/>
         </p:nvPicPr>
         <p:blipFill>
-          <a:blip xmlns:r="http://schemas.openxmlformats.org/officeDocument/2006/relationships" xmlns:a="http://schemas.openxmlformats.org/drawingml/2006/main" r:embed="R9a664ccab6bb4c8e"/>
+          <a:blip xmlns:r="http://schemas.openxmlformats.org/officeDocument/2006/relationships" xmlns:a="http://schemas.openxmlformats.org/drawingml/2006/main" r:embed="Rce336f0aef614f27"/>
           <a:stretch xmlns:a="http://schemas.openxmlformats.org/drawingml/2006/main"/>
         </p:blipFill>
         <p:spPr>
